--- a/微软AI治理分析.pptx
+++ b/微软AI治理分析.pptx
@@ -3103,7 +3103,7 @@
             <a:avLst/>
           </a:prstGeom>
           <a:solidFill>
-            <a:srgbClr val="F4F7FB"/>
+            <a:srgbClr val="FFFFFF"/>
           </a:solidFill>
           <a:ln>
             <a:noFill/>
@@ -3141,7 +3141,51 @@
         <p:spPr>
           <a:xfrm>
             <a:off x="0" y="0"/>
-            <a:ext cx="12191695" cy="164592"/>
+            <a:ext cx="12191695" cy="932688"/>
+          </a:xfrm>
+          <a:prstGeom prst="rect">
+            <a:avLst/>
+          </a:prstGeom>
+          <a:solidFill>
+            <a:srgbClr val="103F91"/>
+          </a:solidFill>
+          <a:ln>
+            <a:noFill/>
+          </a:ln>
+          <a:effectLst/>
+        </p:spPr>
+        <p:style>
+          <a:lnRef idx="1">
+            <a:schemeClr val="accent1"/>
+          </a:lnRef>
+          <a:fillRef idx="3">
+            <a:schemeClr val="accent1"/>
+          </a:fillRef>
+          <a:effectRef idx="2">
+            <a:schemeClr val="accent1"/>
+          </a:effectRef>
+          <a:fontRef idx="minor">
+            <a:schemeClr val="lt1"/>
+          </a:fontRef>
+        </p:style>
+        <p:txBody>
+          <a:bodyPr rtlCol="0" anchor="ctr"/>
+          <a:lstStyle/>
+          <a:p>
+            <a:pPr algn="ctr"/>
+          </a:p>
+        </p:txBody>
+      </p:sp>
+      <p:sp>
+        <p:nvSpPr>
+          <p:cNvPr id="4" name="Rectangle 3"/>
+          <p:cNvSpPr/>
+          <p:nvPr/>
+        </p:nvSpPr>
+        <p:spPr>
+          <a:xfrm>
+            <a:off x="0" y="932688"/>
+            <a:ext cx="12191695" cy="54864"/>
           </a:xfrm>
           <a:prstGeom prst="rect">
             <a:avLst/>
@@ -3178,14 +3222,14 @@
       </p:sp>
       <p:sp>
         <p:nvSpPr>
-          <p:cNvPr id="4" name="TextBox 3"/>
+          <p:cNvPr id="5" name="TextBox 4"/>
           <p:cNvSpPr txBox="1"/>
           <p:nvPr/>
         </p:nvSpPr>
         <p:spPr>
           <a:xfrm>
-            <a:off x="502920" y="292608"/>
-            <a:ext cx="8961120" cy="822960"/>
+            <a:off x="457200" y="91440"/>
+            <a:ext cx="10515600" cy="777240"/>
           </a:xfrm>
           <a:prstGeom prst="rect">
             <a:avLst/>
@@ -3193,7 +3237,7 @@
           <a:noFill/>
         </p:spPr>
         <p:txBody>
-          <a:bodyPr wrap="square" anchor="t" lIns="25400" rIns="25400" tIns="25400" bIns="25400">
+          <a:bodyPr wrap="square" anchor="ctr" lIns="25400" rIns="25400" tIns="12700" bIns="12700">
             <a:spAutoFit/>
           </a:bodyPr>
           <a:lstStyle/>
@@ -3203,18 +3247,17 @@
                 <a:spcPts val="0"/>
               </a:spcBef>
               <a:spcAft>
-                <a:spcPts val="400"/>
+                <a:spcPts val="200"/>
               </a:spcAft>
             </a:pPr>
             <a:r>
               <a:rPr sz="3000" b="1">
                 <a:solidFill>
-                  <a:srgbClr val="1A1A1A"/>
-                </a:solidFill>
-                <a:latin typeface="PingFang SC"/>
-                <a:ea typeface="PingFang SC"/>
+                  <a:srgbClr val="FFFFFF"/>
+                </a:solidFill>
+                <a:latin typeface="Microsoft YaHei"/>
               </a:rPr>
-              <a:t>微软 AI 治理分析</a:t>
+              <a:t>微软 Azure AI 治理分析</a:t>
             </a:r>
           </a:p>
           <a:p>
@@ -3223,32 +3266,209 @@
                 <a:spcPts val="0"/>
               </a:spcBef>
               <a:spcAft>
-                <a:spcPts val="400"/>
+                <a:spcPts val="0"/>
               </a:spcAft>
             </a:pPr>
             <a:r>
               <a:rPr sz="1400" b="0">
                 <a:solidFill>
-                  <a:srgbClr val="5F5F5F"/>
-                </a:solidFill>
-                <a:latin typeface="PingFang SC"/>
-                <a:ea typeface="PingFang SC"/>
+                  <a:srgbClr val="CFE2FA"/>
+                </a:solidFill>
+                <a:latin typeface="Microsoft YaHei"/>
               </a:rPr>
-              <a:t>“合规即竞争力” —— 以欧盟 AI 法案对齐与版权赔付承诺，构建云上 AI 信任壁垒</a:t>
-            </a:r>
-          </a:p>
-        </p:txBody>
-      </p:sp>
-      <p:sp>
-        <p:nvSpPr>
-          <p:cNvPr id="5" name="Rectangle 4"/>
+              <a:t>以负责任 AI 治理对接欧盟《AI法案》，将合规转化为云上 AI 竞争力</a:t>
+            </a:r>
+          </a:p>
+        </p:txBody>
+      </p:sp>
+      <p:sp>
+        <p:nvSpPr>
+          <p:cNvPr id="6" name="TextBox 5"/>
+          <p:cNvSpPr txBox="1"/>
+          <p:nvPr/>
+        </p:nvSpPr>
+        <p:spPr>
+          <a:xfrm>
+            <a:off x="10424160" y="164592"/>
+            <a:ext cx="1554480" cy="640080"/>
+          </a:xfrm>
+          <a:prstGeom prst="rect">
+            <a:avLst/>
+          </a:prstGeom>
+          <a:noFill/>
+        </p:spPr>
+        <p:txBody>
+          <a:bodyPr wrap="square" anchor="ctr" lIns="25400" rIns="25400" tIns="12700" bIns="12700">
+            <a:spAutoFit/>
+          </a:bodyPr>
+          <a:lstStyle/>
+          <a:p>
+            <a:pPr algn="r">
+              <a:spcBef>
+                <a:spcPts val="0"/>
+              </a:spcBef>
+              <a:spcAft>
+                <a:spcPts val="0"/>
+              </a:spcAft>
+            </a:pPr>
+            <a:r>
+              <a:rPr sz="1000" b="0">
+                <a:solidFill>
+                  <a:srgbClr val="BFD8F5"/>
+                </a:solidFill>
+                <a:latin typeface="Microsoft YaHei"/>
+              </a:rPr>
+              <a:t>战略分析 · 一页纸</a:t>
+            </a:r>
+          </a:p>
+        </p:txBody>
+      </p:sp>
+      <p:sp>
+        <p:nvSpPr>
+          <p:cNvPr id="7" name="Rectangle 6"/>
           <p:cNvSpPr/>
           <p:nvPr/>
         </p:nvSpPr>
         <p:spPr>
           <a:xfrm>
-            <a:off x="9555480" y="384048"/>
-            <a:ext cx="2148840" cy="502920"/>
+            <a:off x="457200" y="1170432"/>
+            <a:ext cx="11274552" cy="566928"/>
+          </a:xfrm>
+          <a:prstGeom prst="rect">
+            <a:avLst/>
+          </a:prstGeom>
+          <a:solidFill>
+            <a:srgbClr val="F2F6FC"/>
+          </a:solidFill>
+          <a:ln w="12700">
+            <a:solidFill>
+              <a:srgbClr val="D6E2F2"/>
+            </a:solidFill>
+          </a:ln>
+          <a:effectLst/>
+        </p:spPr>
+        <p:style>
+          <a:lnRef idx="1">
+            <a:schemeClr val="accent1"/>
+          </a:lnRef>
+          <a:fillRef idx="3">
+            <a:schemeClr val="accent1"/>
+          </a:fillRef>
+          <a:effectRef idx="2">
+            <a:schemeClr val="accent1"/>
+          </a:effectRef>
+          <a:fontRef idx="minor">
+            <a:schemeClr val="lt1"/>
+          </a:fontRef>
+        </p:style>
+        <p:txBody>
+          <a:bodyPr rtlCol="0" anchor="ctr"/>
+          <a:lstStyle/>
+          <a:p>
+            <a:pPr algn="ctr"/>
+          </a:p>
+        </p:txBody>
+      </p:sp>
+      <p:sp>
+        <p:nvSpPr>
+          <p:cNvPr id="8" name="TextBox 7"/>
+          <p:cNvSpPr txBox="1"/>
+          <p:nvPr/>
+        </p:nvSpPr>
+        <p:spPr>
+          <a:xfrm>
+            <a:off x="640080" y="1170432"/>
+            <a:ext cx="10972800" cy="566928"/>
+          </a:xfrm>
+          <a:prstGeom prst="rect">
+            <a:avLst/>
+          </a:prstGeom>
+          <a:noFill/>
+        </p:spPr>
+        <p:txBody>
+          <a:bodyPr wrap="square" anchor="ctr" lIns="25400" rIns="25400" tIns="12700" bIns="12700">
+            <a:spAutoFit/>
+          </a:bodyPr>
+          <a:lstStyle/>
+          <a:p>
+            <a:pPr algn="l"/>
+            <a:r>
+              <a:rPr sz="1250" b="1">
+                <a:solidFill>
+                  <a:srgbClr val="103F91"/>
+                </a:solidFill>
+                <a:latin typeface="Microsoft YaHei"/>
+              </a:rPr>
+              <a:t>核心逻辑：</a:t>
+            </a:r>
+            <a:r>
+              <a:rPr sz="1250">
+                <a:solidFill>
+                  <a:srgbClr val="242A35"/>
+                </a:solidFill>
+                <a:latin typeface="Microsoft YaHei"/>
+              </a:rPr>
+              <a:t>治理即信任，信任即销售 —— 微软把“合规成本”重构为“客户采购理由”，用可验证的责任承诺降低企业上云用 AI 的法律与声誉风险。</a:t>
+            </a:r>
+          </a:p>
+        </p:txBody>
+      </p:sp>
+      <p:sp>
+        <p:nvSpPr>
+          <p:cNvPr id="9" name="Rectangle 8"/>
+          <p:cNvSpPr/>
+          <p:nvPr/>
+        </p:nvSpPr>
+        <p:spPr>
+          <a:xfrm>
+            <a:off x="457200" y="1938528"/>
+            <a:ext cx="3648456" cy="2907792"/>
+          </a:xfrm>
+          <a:prstGeom prst="rect">
+            <a:avLst/>
+          </a:prstGeom>
+          <a:solidFill>
+            <a:srgbClr val="FFFFFF"/>
+          </a:solidFill>
+          <a:ln w="15875">
+            <a:solidFill>
+              <a:srgbClr val="D6E2F2"/>
+            </a:solidFill>
+          </a:ln>
+          <a:effectLst/>
+        </p:spPr>
+        <p:style>
+          <a:lnRef idx="1">
+            <a:schemeClr val="accent1"/>
+          </a:lnRef>
+          <a:fillRef idx="3">
+            <a:schemeClr val="accent1"/>
+          </a:fillRef>
+          <a:effectRef idx="2">
+            <a:schemeClr val="accent1"/>
+          </a:effectRef>
+          <a:fontRef idx="minor">
+            <a:schemeClr val="lt1"/>
+          </a:fontRef>
+        </p:style>
+        <p:txBody>
+          <a:bodyPr rtlCol="0" anchor="ctr"/>
+          <a:lstStyle/>
+          <a:p>
+            <a:pPr algn="ctr"/>
+          </a:p>
+        </p:txBody>
+      </p:sp>
+      <p:sp>
+        <p:nvSpPr>
+          <p:cNvPr id="10" name="Rectangle 9"/>
+          <p:cNvSpPr/>
+          <p:nvPr/>
+        </p:nvSpPr>
+        <p:spPr>
+          <a:xfrm>
+            <a:off x="457200" y="1938528"/>
+            <a:ext cx="3648456" cy="475488"/>
           </a:xfrm>
           <a:prstGeom prst="rect">
             <a:avLst/>
@@ -3280,29 +3500,19 @@
           <a:lstStyle/>
           <a:p>
             <a:pPr algn="ctr"/>
-            <a:r>
-              <a:rPr sz="1300" b="1">
-                <a:solidFill>
-                  <a:srgbClr val="FFFFFF"/>
-                </a:solidFill>
-                <a:latin typeface="PingFang SC"/>
-                <a:ea typeface="PingFang SC"/>
-              </a:rPr>
-              <a:t>治理 → 信任 → 分发</a:t>
-            </a:r>
-          </a:p>
-        </p:txBody>
-      </p:sp>
-      <p:sp>
-        <p:nvSpPr>
-          <p:cNvPr id="6" name="TextBox 5"/>
+          </a:p>
+        </p:txBody>
+      </p:sp>
+      <p:sp>
+        <p:nvSpPr>
+          <p:cNvPr id="11" name="TextBox 10"/>
           <p:cNvSpPr txBox="1"/>
           <p:nvPr/>
         </p:nvSpPr>
         <p:spPr>
           <a:xfrm>
-            <a:off x="502920" y="1298448"/>
-            <a:ext cx="11155680" cy="457200"/>
+            <a:off x="566928" y="1938528"/>
+            <a:ext cx="3429000" cy="475488"/>
           </a:xfrm>
           <a:prstGeom prst="rect">
             <a:avLst/>
@@ -3310,7 +3520,7 @@
           <a:noFill/>
         </p:spPr>
         <p:txBody>
-          <a:bodyPr wrap="square" anchor="t" lIns="25400" rIns="25400" tIns="25400" bIns="25400">
+          <a:bodyPr wrap="square" anchor="ctr" lIns="25400" rIns="25400" tIns="12700" bIns="12700">
             <a:spAutoFit/>
           </a:bodyPr>
           <a:lstStyle/>
@@ -3320,42 +3530,149 @@
                 <a:spcPts val="0"/>
               </a:spcBef>
               <a:spcAft>
-                <a:spcPts val="200"/>
+                <a:spcPts val="0"/>
               </a:spcAft>
             </a:pPr>
             <a:r>
-              <a:rPr sz="1400" b="1">
+              <a:rPr sz="1300" b="1">
+                <a:solidFill>
+                  <a:srgbClr val="FFFFFF"/>
+                </a:solidFill>
+                <a:latin typeface="Microsoft YaHei"/>
+              </a:rPr>
+              <a:t>①  治理框架：负责任 AI 体系</a:t>
+            </a:r>
+          </a:p>
+        </p:txBody>
+      </p:sp>
+      <p:sp>
+        <p:nvSpPr>
+          <p:cNvPr id="12" name="TextBox 11"/>
+          <p:cNvSpPr txBox="1"/>
+          <p:nvPr/>
+        </p:nvSpPr>
+        <p:spPr>
+          <a:xfrm>
+            <a:off x="603504" y="2505456"/>
+            <a:ext cx="3355848" cy="2267712"/>
+          </a:xfrm>
+          <a:prstGeom prst="rect">
+            <a:avLst/>
+          </a:prstGeom>
+          <a:noFill/>
+        </p:spPr>
+        <p:txBody>
+          <a:bodyPr wrap="square" anchor="t" lIns="25400" rIns="25400" tIns="12700" bIns="12700">
+            <a:spAutoFit/>
+          </a:bodyPr>
+          <a:lstStyle/>
+          <a:p>
+            <a:pPr algn="l">
+              <a:spcBef>
+                <a:spcPts val="0"/>
+              </a:spcBef>
+              <a:spcAft>
+                <a:spcPts val="500"/>
+              </a:spcAft>
+            </a:pPr>
+            <a:r>
+              <a:rPr sz="1100" b="1">
                 <a:solidFill>
                   <a:srgbClr val="0078D4"/>
                 </a:solidFill>
-                <a:latin typeface="PingFang SC"/>
-                <a:ea typeface="PingFang SC"/>
+                <a:latin typeface="Microsoft YaHei"/>
               </a:rPr>
-              <a:t>核心打法：</a:t>
-            </a:r>
-            <a:r>
-              <a:rPr sz="1400" b="0">
-                <a:solidFill>
-                  <a:srgbClr val="1A1A1A"/>
-                </a:solidFill>
-                <a:latin typeface="PingFang SC"/>
-                <a:ea typeface="PingFang SC"/>
+              <a:t>◆ Responsible AI Standard v2 落地为内部强制流程</a:t>
+            </a:r>
+          </a:p>
+          <a:p>
+            <a:pPr algn="l">
+              <a:spcBef>
+                <a:spcPts val="0"/>
+              </a:spcBef>
+              <a:spcAft>
+                <a:spcPts val="500"/>
+              </a:spcAft>
+            </a:pPr>
+            <a:r>
+              <a:rPr sz="1050" b="0">
+                <a:solidFill>
+                  <a:srgbClr val="242A35"/>
+                </a:solidFill>
+                <a:latin typeface="Microsoft YaHei"/>
               </a:rPr>
-              <a:t>把监管合规与法律风险“内化”为微软自身责任 —— 替客户扫清采用障碍，将治理能力沉淀为 Azure 的差异化护城河</a:t>
-            </a:r>
-          </a:p>
-        </p:txBody>
-      </p:sp>
-      <p:sp>
-        <p:nvSpPr>
-          <p:cNvPr id="7" name="Rectangle 6"/>
+              <a:t>•  六大原则：公平·可靠安全·隐私·包容·透明·可问责</a:t>
+            </a:r>
+          </a:p>
+          <a:p>
+            <a:pPr algn="l">
+              <a:spcBef>
+                <a:spcPts val="0"/>
+              </a:spcBef>
+              <a:spcAft>
+                <a:spcPts val="500"/>
+              </a:spcAft>
+            </a:pPr>
+            <a:r>
+              <a:rPr sz="1050" b="0">
+                <a:solidFill>
+                  <a:srgbClr val="242A35"/>
+                </a:solidFill>
+                <a:latin typeface="Microsoft YaHei"/>
+              </a:rPr>
+              <a:t>•  Office of Responsible AI + RAI 委员会 跨部门治理</a:t>
+            </a:r>
+          </a:p>
+          <a:p>
+            <a:pPr algn="l">
+              <a:spcBef>
+                <a:spcPts val="0"/>
+              </a:spcBef>
+              <a:spcAft>
+                <a:spcPts val="500"/>
+              </a:spcAft>
+            </a:pPr>
+            <a:r>
+              <a:rPr sz="1050" b="0">
+                <a:solidFill>
+                  <a:srgbClr val="242A35"/>
+                </a:solidFill>
+                <a:latin typeface="Microsoft YaHei"/>
+              </a:rPr>
+              <a:t>•  敏感用途审查、影响评估（Impact Assessment）前置</a:t>
+            </a:r>
+          </a:p>
+          <a:p>
+            <a:pPr algn="l">
+              <a:spcBef>
+                <a:spcPts val="0"/>
+              </a:spcBef>
+              <a:spcAft>
+                <a:spcPts val="500"/>
+              </a:spcAft>
+            </a:pPr>
+            <a:r>
+              <a:rPr sz="1050" b="0">
+                <a:solidFill>
+                  <a:srgbClr val="242A35"/>
+                </a:solidFill>
+                <a:latin typeface="Microsoft YaHei"/>
+              </a:rPr>
+              <a:t>•  Transparency Notes 公开模型能力与局限</a:t>
+            </a:r>
+          </a:p>
+        </p:txBody>
+      </p:sp>
+      <p:sp>
+        <p:nvSpPr>
+          <p:cNvPr id="13" name="Rectangle 12"/>
           <p:cNvSpPr/>
           <p:nvPr/>
         </p:nvSpPr>
         <p:spPr>
           <a:xfrm>
-            <a:off x="502920" y="1874519"/>
-            <a:ext cx="3630168" cy="3310128"/>
+            <a:off x="4270248" y="1938528"/>
+            <a:ext cx="3648456" cy="2907792"/>
           </a:xfrm>
           <a:prstGeom prst="rect">
             <a:avLst/>
@@ -3363,9 +3680,9 @@
           <a:solidFill>
             <a:srgbClr val="FFFFFF"/>
           </a:solidFill>
-          <a:ln w="12700">
+          <a:ln w="15875">
             <a:solidFill>
-              <a:srgbClr val="DDE4EC"/>
+              <a:srgbClr val="D6E2F2"/>
             </a:solidFill>
           </a:ln>
           <a:effectLst/>
@@ -3394,20 +3711,20 @@
       </p:sp>
       <p:sp>
         <p:nvSpPr>
-          <p:cNvPr id="8" name="Rectangle 7"/>
+          <p:cNvPr id="14" name="Rectangle 13"/>
           <p:cNvSpPr/>
           <p:nvPr/>
         </p:nvSpPr>
         <p:spPr>
           <a:xfrm>
-            <a:off x="502920" y="1874519"/>
-            <a:ext cx="3630168" cy="749808"/>
+            <a:off x="4270248" y="1938528"/>
+            <a:ext cx="3648456" cy="475488"/>
           </a:xfrm>
           <a:prstGeom prst="rect">
             <a:avLst/>
           </a:prstGeom>
           <a:solidFill>
-            <a:srgbClr val="0078D4"/>
+            <a:srgbClr val="103F91"/>
           </a:solidFill>
           <a:ln>
             <a:noFill/>
@@ -3438,14 +3755,14 @@
       </p:sp>
       <p:sp>
         <p:nvSpPr>
-          <p:cNvPr id="9" name="TextBox 8"/>
+          <p:cNvPr id="15" name="TextBox 14"/>
           <p:cNvSpPr txBox="1"/>
           <p:nvPr/>
         </p:nvSpPr>
         <p:spPr>
           <a:xfrm>
-            <a:off x="704088" y="1965959"/>
-            <a:ext cx="3264408" cy="640080"/>
+            <a:off x="4379976" y="1938528"/>
+            <a:ext cx="3429000" cy="475488"/>
           </a:xfrm>
           <a:prstGeom prst="rect">
             <a:avLst/>
@@ -3453,7 +3770,7 @@
           <a:noFill/>
         </p:spPr>
         <p:txBody>
-          <a:bodyPr wrap="square" anchor="t" lIns="25400" rIns="25400" tIns="25400" bIns="25400">
+          <a:bodyPr wrap="square" anchor="ctr" lIns="25400" rIns="25400" tIns="12700" bIns="12700">
             <a:spAutoFit/>
           </a:bodyPr>
           <a:lstStyle/>
@@ -3463,52 +3780,31 @@
                 <a:spcPts val="0"/>
               </a:spcBef>
               <a:spcAft>
-                <a:spcPts val="100"/>
+                <a:spcPts val="0"/>
               </a:spcAft>
             </a:pPr>
             <a:r>
-              <a:rPr sz="1600" b="1">
+              <a:rPr sz="1300" b="1">
                 <a:solidFill>
                   <a:srgbClr val="FFFFFF"/>
                 </a:solidFill>
-                <a:latin typeface="PingFang SC"/>
-                <a:ea typeface="PingFang SC"/>
+                <a:latin typeface="Microsoft YaHei"/>
               </a:rPr>
-              <a:t>① 合规先行</a:t>
-            </a:r>
-          </a:p>
-          <a:p>
-            <a:pPr algn="l">
-              <a:spcBef>
-                <a:spcPts val="0"/>
-              </a:spcBef>
-              <a:spcAft>
-                <a:spcPts val="100"/>
-              </a:spcAft>
-            </a:pPr>
-            <a:r>
-              <a:rPr sz="1100" b="0">
-                <a:solidFill>
-                  <a:srgbClr val="FFFFFF"/>
-                </a:solidFill>
-                <a:latin typeface="PingFang SC"/>
-                <a:ea typeface="PingFang SC"/>
-              </a:rPr>
-              <a:t>对齐欧盟 AI 法案</a:t>
-            </a:r>
-          </a:p>
-        </p:txBody>
-      </p:sp>
-      <p:sp>
-        <p:nvSpPr>
-          <p:cNvPr id="10" name="TextBox 9"/>
+              <a:t>②  对接欧盟《AI法案》</a:t>
+            </a:r>
+          </a:p>
+        </p:txBody>
+      </p:sp>
+      <p:sp>
+        <p:nvSpPr>
+          <p:cNvPr id="16" name="TextBox 15"/>
           <p:cNvSpPr txBox="1"/>
           <p:nvPr/>
         </p:nvSpPr>
         <p:spPr>
           <a:xfrm>
-            <a:off x="704088" y="2770631"/>
-            <a:ext cx="3246120" cy="2286000"/>
+            <a:off x="4416552" y="2505456"/>
+            <a:ext cx="3355848" cy="2267712"/>
           </a:xfrm>
           <a:prstGeom prst="rect">
             <a:avLst/>
@@ -3516,7 +3812,7 @@
           <a:noFill/>
         </p:spPr>
         <p:txBody>
-          <a:bodyPr wrap="square" anchor="t" lIns="25400" rIns="25400" tIns="25400" bIns="25400">
+          <a:bodyPr wrap="square" anchor="t" lIns="25400" rIns="25400" tIns="12700" bIns="12700">
             <a:spAutoFit/>
           </a:bodyPr>
           <a:lstStyle/>
@@ -3526,28 +3822,17 @@
                 <a:spcPts val="0"/>
               </a:spcBef>
               <a:spcAft>
-                <a:spcPts val="600"/>
+                <a:spcPts val="500"/>
               </a:spcAft>
             </a:pPr>
             <a:r>
-              <a:rPr sz="1200" b="1">
-                <a:solidFill>
-                  <a:srgbClr val="0078D4"/>
-                </a:solidFill>
-                <a:latin typeface="PingFang SC"/>
-                <a:ea typeface="PingFang SC"/>
+              <a:rPr sz="1100" b="1">
+                <a:solidFill>
+                  <a:srgbClr val="103F91"/>
+                </a:solidFill>
+                <a:latin typeface="Microsoft YaHei"/>
               </a:rPr>
-              <a:t>▪ </a:t>
-            </a:r>
-            <a:r>
-              <a:rPr sz="1100" b="1">
-                <a:solidFill>
-                  <a:srgbClr val="1A1A1A"/>
-                </a:solidFill>
-                <a:latin typeface="PingFang SC"/>
-                <a:ea typeface="PingFang SC"/>
-              </a:rPr>
-              <a:t>每份客户合同中承诺遵守 EU AI Act 等全部适用法规</a:t>
+              <a:t>◆ 按风险分级（禁止/高风险/有限/最小）映射产品义务</a:t>
             </a:r>
           </a:p>
           <a:p>
@@ -3556,28 +3841,17 @@
                 <a:spcPts val="0"/>
               </a:spcBef>
               <a:spcAft>
-                <a:spcPts val="600"/>
+                <a:spcPts val="500"/>
               </a:spcAft>
             </a:pPr>
             <a:r>
-              <a:rPr sz="1200" b="1">
-                <a:solidFill>
-                  <a:srgbClr val="0078D4"/>
-                </a:solidFill>
-                <a:latin typeface="PingFang SC"/>
-                <a:ea typeface="PingFang SC"/>
+              <a:rPr sz="1050" b="0">
+                <a:solidFill>
+                  <a:srgbClr val="242A35"/>
+                </a:solidFill>
+                <a:latin typeface="Microsoft YaHei"/>
               </a:rPr>
-              <a:t>▪ </a:t>
-            </a:r>
-            <a:r>
-              <a:rPr sz="1100" b="0">
-                <a:solidFill>
-                  <a:srgbClr val="5F5F5F"/>
-                </a:solidFill>
-                <a:latin typeface="PingFang SC"/>
-                <a:ea typeface="PingFang SC"/>
-              </a:rPr>
-              <a:t>法案分期生效：2025.2 禁止性条款 → 2025.8 GPAI 义务</a:t>
+              <a:t>•  高风险系统：技术文档、日志留存、人工监督、数据治理</a:t>
             </a:r>
           </a:p>
           <a:p>
@@ -3586,28 +3860,17 @@
                 <a:spcPts val="0"/>
               </a:spcBef>
               <a:spcAft>
-                <a:spcPts val="600"/>
+                <a:spcPts val="500"/>
               </a:spcAft>
             </a:pPr>
             <a:r>
-              <a:rPr sz="1200" b="1">
-                <a:solidFill>
-                  <a:srgbClr val="0078D4"/>
-                </a:solidFill>
-                <a:latin typeface="PingFang SC"/>
-                <a:ea typeface="PingFang SC"/>
+              <a:rPr sz="1050" b="0">
+                <a:solidFill>
+                  <a:srgbClr val="242A35"/>
+                </a:solidFill>
+                <a:latin typeface="Microsoft YaHei"/>
               </a:rPr>
-              <a:t>▪ </a:t>
-            </a:r>
-            <a:r>
-              <a:rPr sz="1100" b="0">
-                <a:solidFill>
-                  <a:srgbClr val="5F5F5F"/>
-                </a:solidFill>
-                <a:latin typeface="PingFang SC"/>
-                <a:ea typeface="PingFang SC"/>
-              </a:rPr>
-              <a:t>高风险义务经 Digital Omnibus 延至 2027.12</a:t>
+              <a:t>•  GPAI 通用模型：透明度与版权合规文档</a:t>
             </a:r>
           </a:p>
           <a:p>
@@ -3616,28 +3879,17 @@
                 <a:spcPts val="0"/>
               </a:spcBef>
               <a:spcAft>
-                <a:spcPts val="600"/>
+                <a:spcPts val="500"/>
               </a:spcAft>
             </a:pPr>
             <a:r>
-              <a:rPr sz="1200" b="1">
-                <a:solidFill>
-                  <a:srgbClr val="0078D4"/>
-                </a:solidFill>
-                <a:latin typeface="PingFang SC"/>
-                <a:ea typeface="PingFang SC"/>
+              <a:rPr sz="1050" b="0">
+                <a:solidFill>
+                  <a:srgbClr val="242A35"/>
+                </a:solidFill>
+                <a:latin typeface="Microsoft YaHei"/>
               </a:rPr>
-              <a:t>▪ </a:t>
-            </a:r>
-            <a:r>
-              <a:rPr sz="1100" b="0">
-                <a:solidFill>
-                  <a:srgbClr val="5F5F5F"/>
-                </a:solidFill>
-                <a:latin typeface="PingFang SC"/>
-                <a:ea typeface="PingFang SC"/>
-              </a:rPr>
-              <a:t>设跨职能工作组：治理+工程+法务+政策</a:t>
+              <a:t>•  Azure AI Foundry 内置 评估·红队·内容安全 工具链</a:t>
             </a:r>
           </a:p>
           <a:p>
@@ -3646,42 +3898,31 @@
                 <a:spcPts val="0"/>
               </a:spcBef>
               <a:spcAft>
-                <a:spcPts val="600"/>
+                <a:spcPts val="500"/>
               </a:spcAft>
             </a:pPr>
             <a:r>
-              <a:rPr sz="1200" b="1">
-                <a:solidFill>
-                  <a:srgbClr val="0078D4"/>
-                </a:solidFill>
-                <a:latin typeface="PingFang SC"/>
-                <a:ea typeface="PingFang SC"/>
+              <a:rPr sz="1050" b="0">
+                <a:solidFill>
+                  <a:srgbClr val="242A35"/>
+                </a:solidFill>
+                <a:latin typeface="Microsoft YaHei"/>
               </a:rPr>
-              <a:t>▪ </a:t>
-            </a:r>
-            <a:r>
-              <a:rPr sz="1100" b="0">
-                <a:solidFill>
-                  <a:srgbClr val="5F5F5F"/>
-                </a:solidFill>
-                <a:latin typeface="PingFang SC"/>
-                <a:ea typeface="PingFang SC"/>
-              </a:rPr>
-              <a:t>欧盟数据驻留承诺，回应主权监管压力</a:t>
-            </a:r>
-          </a:p>
-        </p:txBody>
-      </p:sp>
-      <p:sp>
-        <p:nvSpPr>
-          <p:cNvPr id="11" name="Rectangle 10"/>
+              <a:t>•  EU Data Boundary 满足数据驻留与主权要求</a:t>
+            </a:r>
+          </a:p>
+        </p:txBody>
+      </p:sp>
+      <p:sp>
+        <p:nvSpPr>
+          <p:cNvPr id="17" name="Rectangle 16"/>
           <p:cNvSpPr/>
           <p:nvPr/>
         </p:nvSpPr>
         <p:spPr>
           <a:xfrm>
-            <a:off x="4297680" y="1874519"/>
-            <a:ext cx="3630168" cy="3310128"/>
+            <a:off x="8083296" y="1938528"/>
+            <a:ext cx="3648456" cy="2907792"/>
           </a:xfrm>
           <a:prstGeom prst="rect">
             <a:avLst/>
@@ -3689,9 +3930,9 @@
           <a:solidFill>
             <a:srgbClr val="FFFFFF"/>
           </a:solidFill>
-          <a:ln w="12700">
+          <a:ln w="15875">
             <a:solidFill>
-              <a:srgbClr val="DDE4EC"/>
+              <a:srgbClr val="D6E2F2"/>
             </a:solidFill>
           </a:ln>
           <a:effectLst/>
@@ -3720,14 +3961,14 @@
       </p:sp>
       <p:sp>
         <p:nvSpPr>
-          <p:cNvPr id="12" name="Rectangle 11"/>
+          <p:cNvPr id="18" name="Rectangle 17"/>
           <p:cNvSpPr/>
           <p:nvPr/>
         </p:nvSpPr>
         <p:spPr>
           <a:xfrm>
-            <a:off x="4297680" y="1874519"/>
-            <a:ext cx="3630168" cy="749808"/>
+            <a:off x="8083296" y="1938528"/>
+            <a:ext cx="3648456" cy="475488"/>
           </a:xfrm>
           <a:prstGeom prst="rect">
             <a:avLst/>
@@ -3764,14 +4005,14 @@
       </p:sp>
       <p:sp>
         <p:nvSpPr>
-          <p:cNvPr id="13" name="TextBox 12"/>
+          <p:cNvPr id="19" name="TextBox 18"/>
           <p:cNvSpPr txBox="1"/>
           <p:nvPr/>
         </p:nvSpPr>
         <p:spPr>
           <a:xfrm>
-            <a:off x="4498848" y="1965959"/>
-            <a:ext cx="3264408" cy="640080"/>
+            <a:off x="8193024" y="1938528"/>
+            <a:ext cx="3429000" cy="475488"/>
           </a:xfrm>
           <a:prstGeom prst="rect">
             <a:avLst/>
@@ -3779,7 +4020,7 @@
           <a:noFill/>
         </p:spPr>
         <p:txBody>
-          <a:bodyPr wrap="square" anchor="t" lIns="25400" rIns="25400" tIns="25400" bIns="25400">
+          <a:bodyPr wrap="square" anchor="ctr" lIns="25400" rIns="25400" tIns="12700" bIns="12700">
             <a:spAutoFit/>
           </a:bodyPr>
           <a:lstStyle/>
@@ -3789,52 +4030,31 @@
                 <a:spcPts val="0"/>
               </a:spcBef>
               <a:spcAft>
-                <a:spcPts val="100"/>
+                <a:spcPts val="0"/>
               </a:spcAft>
             </a:pPr>
             <a:r>
-              <a:rPr sz="1600" b="1">
+              <a:rPr sz="1300" b="1">
                 <a:solidFill>
                   <a:srgbClr val="FFFFFF"/>
                 </a:solidFill>
-                <a:latin typeface="PingFang SC"/>
-                <a:ea typeface="PingFang SC"/>
+                <a:latin typeface="Microsoft YaHei"/>
               </a:rPr>
-              <a:t>② 责任承诺</a:t>
-            </a:r>
-          </a:p>
-          <a:p>
-            <a:pPr algn="l">
-              <a:spcBef>
-                <a:spcPts val="0"/>
-              </a:spcBef>
-              <a:spcAft>
-                <a:spcPts val="100"/>
-              </a:spcAft>
-            </a:pPr>
-            <a:r>
-              <a:rPr sz="1100" b="0">
-                <a:solidFill>
-                  <a:srgbClr val="FFFFFF"/>
-                </a:solidFill>
-                <a:latin typeface="PingFang SC"/>
-                <a:ea typeface="PingFang SC"/>
-              </a:rPr>
-              <a:t>客户版权承诺 (CCC)</a:t>
-            </a:r>
-          </a:p>
-        </p:txBody>
-      </p:sp>
-      <p:sp>
-        <p:nvSpPr>
-          <p:cNvPr id="14" name="TextBox 13"/>
+              <a:t>③  转化为云上竞争力</a:t>
+            </a:r>
+          </a:p>
+        </p:txBody>
+      </p:sp>
+      <p:sp>
+        <p:nvSpPr>
+          <p:cNvPr id="20" name="TextBox 19"/>
           <p:cNvSpPr txBox="1"/>
           <p:nvPr/>
         </p:nvSpPr>
         <p:spPr>
           <a:xfrm>
-            <a:off x="4498848" y="2770631"/>
-            <a:ext cx="3246120" cy="2286000"/>
+            <a:off x="8229600" y="2505456"/>
+            <a:ext cx="3355848" cy="2267712"/>
           </a:xfrm>
           <a:prstGeom prst="rect">
             <a:avLst/>
@@ -3842,7 +4062,7 @@
           <a:noFill/>
         </p:spPr>
         <p:txBody>
-          <a:bodyPr wrap="square" anchor="t" lIns="25400" rIns="25400" tIns="25400" bIns="25400">
+          <a:bodyPr wrap="square" anchor="t" lIns="25400" rIns="25400" tIns="12700" bIns="12700">
             <a:spAutoFit/>
           </a:bodyPr>
           <a:lstStyle/>
@@ -3852,28 +4072,17 @@
                 <a:spcPts val="0"/>
               </a:spcBef>
               <a:spcAft>
-                <a:spcPts val="600"/>
+                <a:spcPts val="500"/>
               </a:spcAft>
             </a:pPr>
             <a:r>
-              <a:rPr sz="1200" b="1">
+              <a:rPr sz="1100" b="1">
                 <a:solidFill>
                   <a:srgbClr val="107C41"/>
                 </a:solidFill>
-                <a:latin typeface="PingFang SC"/>
-                <a:ea typeface="PingFang SC"/>
+                <a:latin typeface="Microsoft YaHei"/>
               </a:rPr>
-              <a:t>▪ </a:t>
-            </a:r>
-            <a:r>
-              <a:rPr sz="1100" b="1">
-                <a:solidFill>
-                  <a:srgbClr val="1A1A1A"/>
-                </a:solidFill>
-                <a:latin typeface="PingFang SC"/>
-                <a:ea typeface="PingFang SC"/>
-              </a:rPr>
-              <a:t>2023.9 推出、10.1 生效，扩展商业 Copilot 赔付</a:t>
+              <a:t>◆ 客户版权承诺（Customer Copyright Commitment）</a:t>
             </a:r>
           </a:p>
           <a:p>
@@ -3882,28 +4091,17 @@
                 <a:spcPts val="0"/>
               </a:spcBef>
               <a:spcAft>
-                <a:spcPts val="600"/>
+                <a:spcPts val="500"/>
               </a:spcAft>
             </a:pPr>
             <a:r>
-              <a:rPr sz="1200" b="1">
-                <a:solidFill>
-                  <a:srgbClr val="107C41"/>
-                </a:solidFill>
-                <a:latin typeface="PingFang SC"/>
-                <a:ea typeface="PingFang SC"/>
+              <a:rPr sz="1050" b="0">
+                <a:solidFill>
+                  <a:srgbClr val="242A35"/>
+                </a:solidFill>
+                <a:latin typeface="Microsoft YaHei"/>
               </a:rPr>
-              <a:t>▪ </a:t>
-            </a:r>
-            <a:r>
-              <a:rPr sz="1100" b="0">
-                <a:solidFill>
-                  <a:srgbClr val="5F5F5F"/>
-                </a:solidFill>
-                <a:latin typeface="PingFang SC"/>
-                <a:ea typeface="PingFang SC"/>
-              </a:rPr>
-              <a:t>客户因 Copilot 输出被诉版权侵权，微软出庭抗辩</a:t>
+              <a:t>•  为 Copilot/Azure OpenAI 输出引发的版权诉讼买单担责</a:t>
             </a:r>
           </a:p>
           <a:p>
@@ -3912,28 +4110,17 @@
                 <a:spcPts val="0"/>
               </a:spcBef>
               <a:spcAft>
-                <a:spcPts val="600"/>
+                <a:spcPts val="500"/>
               </a:spcAft>
             </a:pPr>
             <a:r>
-              <a:rPr sz="1200" b="1">
-                <a:solidFill>
-                  <a:srgbClr val="107C41"/>
-                </a:solidFill>
-                <a:latin typeface="PingFang SC"/>
-                <a:ea typeface="PingFang SC"/>
+              <a:rPr sz="1050" b="0">
+                <a:solidFill>
+                  <a:srgbClr val="242A35"/>
+                </a:solidFill>
+                <a:latin typeface="Microsoft YaHei"/>
               </a:rPr>
-              <a:t>▪ </a:t>
-            </a:r>
-            <a:r>
-              <a:rPr sz="1100" b="0">
-                <a:solidFill>
-                  <a:srgbClr val="5F5F5F"/>
-                </a:solidFill>
-                <a:latin typeface="PingFang SC"/>
-                <a:ea typeface="PingFang SC"/>
-              </a:rPr>
-              <a:t>并承担由此产生的判决与和解赔偿金额</a:t>
+              <a:t>•  Azure AI Content Safety：内容过滤即开即用</a:t>
             </a:r>
           </a:p>
           <a:p>
@@ -3942,28 +4129,17 @@
                 <a:spcPts val="0"/>
               </a:spcBef>
               <a:spcAft>
-                <a:spcPts val="600"/>
+                <a:spcPts val="500"/>
               </a:spcAft>
             </a:pPr>
             <a:r>
-              <a:rPr sz="1200" b="1">
-                <a:solidFill>
-                  <a:srgbClr val="107C41"/>
-                </a:solidFill>
-                <a:latin typeface="PingFang SC"/>
-                <a:ea typeface="PingFang SC"/>
+              <a:rPr sz="1050" b="0">
+                <a:solidFill>
+                  <a:srgbClr val="242A35"/>
+                </a:solidFill>
+                <a:latin typeface="Microsoft YaHei"/>
               </a:rPr>
-              <a:t>▪ </a:t>
-            </a:r>
-            <a:r>
-              <a:rPr sz="1100" b="0">
-                <a:solidFill>
-                  <a:srgbClr val="5F5F5F"/>
-                </a:solidFill>
-                <a:latin typeface="PingFang SC"/>
-                <a:ea typeface="PingFang SC"/>
-              </a:rPr>
-              <a:t>前提：须开启内置护栏与内容过滤器</a:t>
+              <a:t>•  合规可作为卖点：降低客户合规自建成本</a:t>
             </a:r>
           </a:p>
           <a:p>
@@ -3972,52 +4148,41 @@
                 <a:spcPts val="0"/>
               </a:spcBef>
               <a:spcAft>
-                <a:spcPts val="600"/>
+                <a:spcPts val="500"/>
               </a:spcAft>
             </a:pPr>
             <a:r>
-              <a:rPr sz="1200" b="1">
-                <a:solidFill>
-                  <a:srgbClr val="107C41"/>
-                </a:solidFill>
-                <a:latin typeface="PingFang SC"/>
-                <a:ea typeface="PingFang SC"/>
+              <a:rPr sz="1050" b="0">
+                <a:solidFill>
+                  <a:srgbClr val="242A35"/>
+                </a:solidFill>
+                <a:latin typeface="Microsoft YaHei"/>
               </a:rPr>
-              <a:t>▪ </a:t>
-            </a:r>
-            <a:r>
-              <a:rPr sz="1100" b="0">
-                <a:solidFill>
-                  <a:srgbClr val="5F5F5F"/>
-                </a:solidFill>
-                <a:latin typeface="PingFang SC"/>
-                <a:ea typeface="PingFang SC"/>
-              </a:rPr>
-              <a:t>覆盖 M365 / GitHub Copilot；不含免费与消费版</a:t>
-            </a:r>
-          </a:p>
-        </p:txBody>
-      </p:sp>
-      <p:sp>
-        <p:nvSpPr>
-          <p:cNvPr id="15" name="Rectangle 14"/>
+              <a:t>•  差异化对标 AWS/Google，绑定受监管行业大客户</a:t>
+            </a:r>
+          </a:p>
+        </p:txBody>
+      </p:sp>
+      <p:sp>
+        <p:nvSpPr>
+          <p:cNvPr id="21" name="Rectangle 20"/>
           <p:cNvSpPr/>
           <p:nvPr/>
         </p:nvSpPr>
         <p:spPr>
           <a:xfrm>
-            <a:off x="8092440" y="1874519"/>
-            <a:ext cx="3630168" cy="3310128"/>
+            <a:off x="457200" y="5029200"/>
+            <a:ext cx="5532120" cy="1298448"/>
           </a:xfrm>
           <a:prstGeom prst="rect">
             <a:avLst/>
           </a:prstGeom>
           <a:solidFill>
-            <a:srgbClr val="FFFFFF"/>
+            <a:srgbClr val="FFF4EC"/>
           </a:solidFill>
-          <a:ln w="12700">
+          <a:ln w="15875">
             <a:solidFill>
-              <a:srgbClr val="DDE4EC"/>
+              <a:srgbClr val="D83B01"/>
             </a:solidFill>
           </a:ln>
           <a:effectLst/>
@@ -4046,20 +4211,100 @@
       </p:sp>
       <p:sp>
         <p:nvSpPr>
-          <p:cNvPr id="16" name="Rectangle 15"/>
+          <p:cNvPr id="22" name="TextBox 21"/>
+          <p:cNvSpPr txBox="1"/>
+          <p:nvPr/>
+        </p:nvSpPr>
+        <p:spPr>
+          <a:xfrm>
+            <a:off x="640080" y="5102352"/>
+            <a:ext cx="5166360" cy="1152144"/>
+          </a:xfrm>
+          <a:prstGeom prst="rect">
+            <a:avLst/>
+          </a:prstGeom>
+          <a:noFill/>
+        </p:spPr>
+        <p:txBody>
+          <a:bodyPr wrap="square" anchor="t" lIns="25400" rIns="25400" tIns="12700" bIns="12700">
+            <a:spAutoFit/>
+          </a:bodyPr>
+          <a:lstStyle/>
+          <a:p>
+            <a:pPr algn="l">
+              <a:spcBef>
+                <a:spcPts val="0"/>
+              </a:spcBef>
+              <a:spcAft>
+                <a:spcPts val="400"/>
+              </a:spcAft>
+            </a:pPr>
+            <a:r>
+              <a:rPr sz="1250" b="1">
+                <a:solidFill>
+                  <a:srgbClr val="D83B01"/>
+                </a:solidFill>
+                <a:latin typeface="Microsoft YaHei"/>
+              </a:rPr>
+              <a:t>聚焦 · 版权纠纷承诺如何建立竞争壁垒</a:t>
+            </a:r>
+          </a:p>
+          <a:p>
+            <a:pPr algn="l">
+              <a:spcBef>
+                <a:spcPts val="0"/>
+              </a:spcBef>
+              <a:spcAft>
+                <a:spcPts val="300"/>
+              </a:spcAft>
+            </a:pPr>
+            <a:r>
+              <a:rPr sz="1050" b="0">
+                <a:solidFill>
+                  <a:srgbClr val="242A35"/>
+                </a:solidFill>
+                <a:latin typeface="Microsoft YaHei"/>
+              </a:rPr>
+              <a:t>•  承诺为合规使用其 AI 产品的客户承担版权侵权赔偿，将“生成内容是否侵权”的不确定性由客户转移至微软。</a:t>
+            </a:r>
+          </a:p>
+          <a:p>
+            <a:pPr algn="l">
+              <a:spcBef>
+                <a:spcPts val="0"/>
+              </a:spcBef>
+              <a:spcAft>
+                <a:spcPts val="300"/>
+              </a:spcAft>
+            </a:pPr>
+            <a:r>
+              <a:rPr sz="1050" b="0">
+                <a:solidFill>
+                  <a:srgbClr val="242A35"/>
+                </a:solidFill>
+                <a:latin typeface="Microsoft YaHei"/>
+              </a:rPr>
+              <a:t>•  前提：客户须启用内容过滤等防护——以“责任共担”反向引导客户采用治理工具，形成正循环。</a:t>
+            </a:r>
+          </a:p>
+        </p:txBody>
+      </p:sp>
+      <p:sp>
+        <p:nvSpPr>
+          <p:cNvPr id="23" name="Rectangle 22"/>
           <p:cNvSpPr/>
           <p:nvPr/>
         </p:nvSpPr>
         <p:spPr>
           <a:xfrm>
-            <a:off x="8092440" y="1874519"/>
-            <a:ext cx="3630168" cy="749808"/>
+            <a:off x="6199632" y="5029200"/>
+            <a:ext cx="5532120" cy="1298448"/>
           </a:xfrm>
           <a:prstGeom prst="rect">
             <a:avLst/>
           </a:prstGeom>
           <a:solidFill>
-            <a:srgbClr val="5C2D91"/>
+            <a:srgbClr val="103F91"/>
           </a:solidFill>
           <a:ln>
             <a:noFill/>
@@ -4090,14 +4335,14 @@
       </p:sp>
       <p:sp>
         <p:nvSpPr>
-          <p:cNvPr id="17" name="TextBox 16"/>
+          <p:cNvPr id="24" name="TextBox 23"/>
           <p:cNvSpPr txBox="1"/>
           <p:nvPr/>
         </p:nvSpPr>
         <p:spPr>
           <a:xfrm>
-            <a:off x="8293608" y="1965959"/>
-            <a:ext cx="3264408" cy="640080"/>
+            <a:off x="6382512" y="5102352"/>
+            <a:ext cx="5166360" cy="1152144"/>
           </a:xfrm>
           <a:prstGeom prst="rect">
             <a:avLst/>
@@ -4105,7 +4350,7 @@
           <a:noFill/>
         </p:spPr>
         <p:txBody>
-          <a:bodyPr wrap="square" anchor="t" lIns="25400" rIns="25400" tIns="25400" bIns="25400">
+          <a:bodyPr wrap="square" anchor="t" lIns="25400" rIns="25400" tIns="12700" bIns="12700">
             <a:spAutoFit/>
           </a:bodyPr>
           <a:lstStyle/>
@@ -4115,280 +4360,19 @@
                 <a:spcPts val="0"/>
               </a:spcBef>
               <a:spcAft>
-                <a:spcPts val="100"/>
+                <a:spcPts val="400"/>
               </a:spcAft>
             </a:pPr>
             <a:r>
-              <a:rPr sz="1600" b="1">
+              <a:rPr sz="1250" b="1">
                 <a:solidFill>
                   <a:srgbClr val="FFFFFF"/>
                 </a:solidFill>
-                <a:latin typeface="PingFang SC"/>
-                <a:ea typeface="PingFang SC"/>
+                <a:latin typeface="Microsoft YaHei"/>
               </a:rPr>
-              <a:t>③ 治理体系</a:t>
-            </a:r>
-          </a:p>
-          <a:p>
-            <a:pPr algn="l">
-              <a:spcBef>
-                <a:spcPts val="0"/>
-              </a:spcBef>
-              <a:spcAft>
-                <a:spcPts val="100"/>
-              </a:spcAft>
-            </a:pPr>
-            <a:r>
-              <a:rPr sz="1100" b="0">
-                <a:solidFill>
-                  <a:srgbClr val="FFFFFF"/>
-                </a:solidFill>
-                <a:latin typeface="PingFang SC"/>
-                <a:ea typeface="PingFang SC"/>
-              </a:rPr>
-              <a:t>把“负责任AI”产品化</a:t>
-            </a:r>
-          </a:p>
-        </p:txBody>
-      </p:sp>
-      <p:sp>
-        <p:nvSpPr>
-          <p:cNvPr id="18" name="TextBox 17"/>
-          <p:cNvSpPr txBox="1"/>
-          <p:nvPr/>
-        </p:nvSpPr>
-        <p:spPr>
-          <a:xfrm>
-            <a:off x="8293608" y="2770631"/>
-            <a:ext cx="3246120" cy="2286000"/>
-          </a:xfrm>
-          <a:prstGeom prst="rect">
-            <a:avLst/>
-          </a:prstGeom>
-          <a:noFill/>
-        </p:spPr>
-        <p:txBody>
-          <a:bodyPr wrap="square" anchor="t" lIns="25400" rIns="25400" tIns="25400" bIns="25400">
-            <a:spAutoFit/>
-          </a:bodyPr>
-          <a:lstStyle/>
-          <a:p>
-            <a:pPr algn="l">
-              <a:spcBef>
-                <a:spcPts val="0"/>
-              </a:spcBef>
-              <a:spcAft>
-                <a:spcPts val="600"/>
-              </a:spcAft>
-            </a:pPr>
-            <a:r>
-              <a:rPr sz="1200" b="1">
-                <a:solidFill>
-                  <a:srgbClr val="5C2D91"/>
-                </a:solidFill>
-                <a:latin typeface="PingFang SC"/>
-                <a:ea typeface="PingFang SC"/>
-              </a:rPr>
-              <a:t>▪ </a:t>
-            </a:r>
-            <a:r>
-              <a:rPr sz="1100" b="1">
-                <a:solidFill>
-                  <a:srgbClr val="1A1A1A"/>
-                </a:solidFill>
-                <a:latin typeface="PingFang SC"/>
-                <a:ea typeface="PingFang SC"/>
-              </a:rPr>
-              <a:t>Responsible AI Standard + 年度透明度报告</a:t>
-            </a:r>
-          </a:p>
-          <a:p>
-            <a:pPr algn="l">
-              <a:spcBef>
-                <a:spcPts val="0"/>
-              </a:spcBef>
-              <a:spcAft>
-                <a:spcPts val="600"/>
-              </a:spcAft>
-            </a:pPr>
-            <a:r>
-              <a:rPr sz="1200" b="1">
-                <a:solidFill>
-                  <a:srgbClr val="5C2D91"/>
-                </a:solidFill>
-                <a:latin typeface="PingFang SC"/>
-                <a:ea typeface="PingFang SC"/>
-              </a:rPr>
-              <a:t>▪ </a:t>
-            </a:r>
-            <a:r>
-              <a:rPr sz="1100" b="0">
-                <a:solidFill>
-                  <a:srgbClr val="5F5F5F"/>
-                </a:solidFill>
-                <a:latin typeface="PingFang SC"/>
-                <a:ea typeface="PingFang SC"/>
-              </a:rPr>
-              <a:t>Azure AI Content Safety、透明度说明、内容凭证</a:t>
-            </a:r>
-          </a:p>
-          <a:p>
-            <a:pPr algn="l">
-              <a:spcBef>
-                <a:spcPts val="0"/>
-              </a:spcBef>
-              <a:spcAft>
-                <a:spcPts val="600"/>
-              </a:spcAft>
-            </a:pPr>
-            <a:r>
-              <a:rPr sz="1200" b="1">
-                <a:solidFill>
-                  <a:srgbClr val="5C2D91"/>
-                </a:solidFill>
-                <a:latin typeface="PingFang SC"/>
-                <a:ea typeface="PingFang SC"/>
-              </a:rPr>
-              <a:t>▪ </a:t>
-            </a:r>
-            <a:r>
-              <a:rPr sz="1100" b="0">
-                <a:solidFill>
-                  <a:srgbClr val="5F5F5F"/>
-                </a:solidFill>
-                <a:latin typeface="PingFang SC"/>
-                <a:ea typeface="PingFang SC"/>
-              </a:rPr>
-              <a:t>Purview 合规管理器模板、风险评估与文档框架</a:t>
-            </a:r>
-          </a:p>
-          <a:p>
-            <a:pPr algn="l">
-              <a:spcBef>
-                <a:spcPts val="0"/>
-              </a:spcBef>
-              <a:spcAft>
-                <a:spcPts val="600"/>
-              </a:spcAft>
-            </a:pPr>
-            <a:r>
-              <a:rPr sz="1200" b="1">
-                <a:solidFill>
-                  <a:srgbClr val="5C2D91"/>
-                </a:solidFill>
-                <a:latin typeface="PingFang SC"/>
-                <a:ea typeface="PingFang SC"/>
-              </a:rPr>
-              <a:t>▪ </a:t>
-            </a:r>
-            <a:r>
-              <a:rPr sz="1100" b="0">
-                <a:solidFill>
-                  <a:srgbClr val="5F5F5F"/>
-                </a:solidFill>
-                <a:latin typeface="PingFang SC"/>
-                <a:ea typeface="PingFang SC"/>
-              </a:rPr>
-              <a:t>Trust Center 设 EU AI Act 合规专区</a:t>
-            </a:r>
-          </a:p>
-          <a:p>
-            <a:pPr algn="l">
-              <a:spcBef>
-                <a:spcPts val="0"/>
-              </a:spcBef>
-              <a:spcAft>
-                <a:spcPts val="600"/>
-              </a:spcAft>
-            </a:pPr>
-            <a:r>
-              <a:rPr sz="1200" b="1">
-                <a:solidFill>
-                  <a:srgbClr val="5C2D91"/>
-                </a:solidFill>
-                <a:latin typeface="PingFang SC"/>
-                <a:ea typeface="PingFang SC"/>
-              </a:rPr>
-              <a:t>▪ </a:t>
-            </a:r>
-            <a:r>
-              <a:rPr sz="1100" b="0">
-                <a:solidFill>
-                  <a:srgbClr val="5F5F5F"/>
-                </a:solidFill>
-                <a:latin typeface="PingFang SC"/>
-                <a:ea typeface="PingFang SC"/>
-              </a:rPr>
-              <a:t>AI 客户承诺(2024.6)：知识共享·工具·文档支持</a:t>
-            </a:r>
-          </a:p>
-        </p:txBody>
-      </p:sp>
-      <p:sp>
-        <p:nvSpPr>
-          <p:cNvPr id="19" name="Rectangle 18"/>
-          <p:cNvSpPr/>
-          <p:nvPr/>
-        </p:nvSpPr>
-        <p:spPr>
-          <a:xfrm>
-            <a:off x="502920" y="5413248"/>
-            <a:ext cx="11183112" cy="1078992"/>
-          </a:xfrm>
-          <a:prstGeom prst="rect">
-            <a:avLst/>
-          </a:prstGeom>
-          <a:solidFill>
-            <a:srgbClr val="1B293A"/>
-          </a:solidFill>
-          <a:ln>
-            <a:noFill/>
-          </a:ln>
-          <a:effectLst/>
-        </p:spPr>
-        <p:style>
-          <a:lnRef idx="1">
-            <a:schemeClr val="accent1"/>
-          </a:lnRef>
-          <a:fillRef idx="3">
-            <a:schemeClr val="accent1"/>
-          </a:fillRef>
-          <a:effectRef idx="2">
-            <a:schemeClr val="accent1"/>
-          </a:effectRef>
-          <a:fontRef idx="minor">
-            <a:schemeClr val="lt1"/>
-          </a:fontRef>
-        </p:style>
-        <p:txBody>
-          <a:bodyPr rtlCol="0" anchor="ctr"/>
-          <a:lstStyle/>
-          <a:p>
-            <a:pPr algn="ctr"/>
-          </a:p>
-        </p:txBody>
-      </p:sp>
-      <p:sp>
-        <p:nvSpPr>
-          <p:cNvPr id="20" name="TextBox 19"/>
-          <p:cNvSpPr txBox="1"/>
-          <p:nvPr/>
-        </p:nvSpPr>
-        <p:spPr>
-          <a:xfrm>
-            <a:off x="658368" y="5577840"/>
-            <a:ext cx="2596896" cy="914400"/>
-          </a:xfrm>
-          <a:prstGeom prst="rect">
-            <a:avLst/>
-          </a:prstGeom>
-          <a:noFill/>
-        </p:spPr>
-        <p:txBody>
-          <a:bodyPr wrap="square" anchor="t" lIns="25400" rIns="25400" tIns="25400" bIns="25400">
-            <a:spAutoFit/>
-          </a:bodyPr>
-          <a:lstStyle/>
+              <a:t>启示 · 治理驱动的增长飞轮</a:t>
+            </a:r>
+          </a:p>
           <a:p>
             <a:pPr algn="l">
               <a:spcBef>
@@ -4399,14 +4383,13 @@
               </a:spcAft>
             </a:pPr>
             <a:r>
-              <a:rPr sz="1350" b="1">
-                <a:solidFill>
-                  <a:srgbClr val="5EB0FF"/>
-                </a:solidFill>
-                <a:latin typeface="PingFang SC"/>
-                <a:ea typeface="PingFang SC"/>
+              <a:rPr sz="1050" b="0">
+                <a:solidFill>
+                  <a:srgbClr val="D6E6FA"/>
+                </a:solidFill>
+                <a:latin typeface="Microsoft YaHei"/>
               </a:rPr>
-              <a:t>治理即信任</a:t>
+              <a:t>→  合规先发 → 赢得受监管客户信任 → 数据与场景沉淀 → 模型与治理工具迭代 → 更强合规能力。</a:t>
             </a:r>
           </a:p>
           <a:p>
@@ -4421,26 +4404,25 @@
             <a:r>
               <a:rPr sz="1050" b="0">
                 <a:solidFill>
-                  <a:srgbClr val="DDDDDD"/>
-                </a:solidFill>
-                <a:latin typeface="PingFang SC"/>
-                <a:ea typeface="PingFang SC"/>
+                  <a:srgbClr val="D6E6FA"/>
+                </a:solidFill>
+                <a:latin typeface="Microsoft YaHei"/>
               </a:rPr>
-              <a:t>合规对齐+赔付承诺，化解企业法律与合规顾虑</a:t>
-            </a:r>
-          </a:p>
-        </p:txBody>
-      </p:sp>
-      <p:sp>
-        <p:nvSpPr>
-          <p:cNvPr id="21" name="TextBox 20"/>
+              <a:t>→  对中国云厂商：治理框架、透明度文档与责任承诺是出海与高端客户的“入场券”。</a:t>
+            </a:r>
+          </a:p>
+        </p:txBody>
+      </p:sp>
+      <p:sp>
+        <p:nvSpPr>
+          <p:cNvPr id="25" name="TextBox 24"/>
           <p:cNvSpPr txBox="1"/>
           <p:nvPr/>
         </p:nvSpPr>
         <p:spPr>
           <a:xfrm>
-            <a:off x="3401568" y="5577840"/>
-            <a:ext cx="2596896" cy="914400"/>
+            <a:off x="457200" y="6510528"/>
+            <a:ext cx="11274552" cy="274320"/>
           </a:xfrm>
           <a:prstGeom prst="rect">
             <a:avLst/>
@@ -4448,7 +4430,7 @@
           <a:noFill/>
         </p:spPr>
         <p:txBody>
-          <a:bodyPr wrap="square" anchor="t" lIns="25400" rIns="25400" tIns="25400" bIns="25400">
+          <a:bodyPr wrap="square" anchor="ctr" lIns="25400" rIns="25400" tIns="12700" bIns="12700">
             <a:spAutoFit/>
           </a:bodyPr>
           <a:lstStyle/>
@@ -4458,207 +4440,17 @@
                 <a:spcPts val="0"/>
               </a:spcBef>
               <a:spcAft>
-                <a:spcPts val="300"/>
+                <a:spcPts val="0"/>
               </a:spcAft>
             </a:pPr>
             <a:r>
-              <a:rPr sz="1350" b="1">
-                <a:solidFill>
-                  <a:srgbClr val="5EB0FF"/>
-                </a:solidFill>
-                <a:latin typeface="PingFang SC"/>
-                <a:ea typeface="PingFang SC"/>
+              <a:rPr sz="850" b="0">
+                <a:solidFill>
+                  <a:srgbClr val="5A6370"/>
+                </a:solidFill>
+                <a:latin typeface="Microsoft YaHei"/>
               </a:rPr>
-              <a:t>信任即分发</a:t>
-            </a:r>
-          </a:p>
-          <a:p>
-            <a:pPr algn="l">
-              <a:spcBef>
-                <a:spcPts val="0"/>
-              </a:spcBef>
-              <a:spcAft>
-                <a:spcPts val="300"/>
-              </a:spcAft>
-            </a:pPr>
-            <a:r>
-              <a:rPr sz="1050" b="0">
-                <a:solidFill>
-                  <a:srgbClr val="DDDDDD"/>
-                </a:solidFill>
-                <a:latin typeface="PingFang SC"/>
-                <a:ea typeface="PingFang SC"/>
-              </a:rPr>
-              <a:t>信任转化为云上采纳，放大 Azure AI 触达</a:t>
-            </a:r>
-          </a:p>
-        </p:txBody>
-      </p:sp>
-      <p:sp>
-        <p:nvSpPr>
-          <p:cNvPr id="22" name="TextBox 21"/>
-          <p:cNvSpPr txBox="1"/>
-          <p:nvPr/>
-        </p:nvSpPr>
-        <p:spPr>
-          <a:xfrm>
-            <a:off x="6144768" y="5577840"/>
-            <a:ext cx="2596896" cy="914400"/>
-          </a:xfrm>
-          <a:prstGeom prst="rect">
-            <a:avLst/>
-          </a:prstGeom>
-          <a:noFill/>
-        </p:spPr>
-        <p:txBody>
-          <a:bodyPr wrap="square" anchor="t" lIns="25400" rIns="25400" tIns="25400" bIns="25400">
-            <a:spAutoFit/>
-          </a:bodyPr>
-          <a:lstStyle/>
-          <a:p>
-            <a:pPr algn="l">
-              <a:spcBef>
-                <a:spcPts val="0"/>
-              </a:spcBef>
-              <a:spcAft>
-                <a:spcPts val="300"/>
-              </a:spcAft>
-            </a:pPr>
-            <a:r>
-              <a:rPr sz="1350" b="1">
-                <a:solidFill>
-                  <a:srgbClr val="5EB0FF"/>
-                </a:solidFill>
-                <a:latin typeface="PingFang SC"/>
-                <a:ea typeface="PingFang SC"/>
-              </a:rPr>
-              <a:t>合规即壁垒</a:t>
-            </a:r>
-          </a:p>
-          <a:p>
-            <a:pPr algn="l">
-              <a:spcBef>
-                <a:spcPts val="0"/>
-              </a:spcBef>
-              <a:spcAft>
-                <a:spcPts val="300"/>
-              </a:spcAft>
-            </a:pPr>
-            <a:r>
-              <a:rPr sz="1050" b="0">
-                <a:solidFill>
-                  <a:srgbClr val="DDDDDD"/>
-                </a:solidFill>
-                <a:latin typeface="PingFang SC"/>
-                <a:ea typeface="PingFang SC"/>
-              </a:rPr>
-              <a:t>把监管复杂度转为能力，中小厂商难以复制</a:t>
-            </a:r>
-          </a:p>
-        </p:txBody>
-      </p:sp>
-      <p:sp>
-        <p:nvSpPr>
-          <p:cNvPr id="23" name="TextBox 22"/>
-          <p:cNvSpPr txBox="1"/>
-          <p:nvPr/>
-        </p:nvSpPr>
-        <p:spPr>
-          <a:xfrm>
-            <a:off x="8887968" y="5577840"/>
-            <a:ext cx="2596896" cy="914400"/>
-          </a:xfrm>
-          <a:prstGeom prst="rect">
-            <a:avLst/>
-          </a:prstGeom>
-          <a:noFill/>
-        </p:spPr>
-        <p:txBody>
-          <a:bodyPr wrap="square" anchor="t" lIns="25400" rIns="25400" tIns="25400" bIns="25400">
-            <a:spAutoFit/>
-          </a:bodyPr>
-          <a:lstStyle/>
-          <a:p>
-            <a:pPr algn="l">
-              <a:spcBef>
-                <a:spcPts val="0"/>
-              </a:spcBef>
-              <a:spcAft>
-                <a:spcPts val="300"/>
-              </a:spcAft>
-            </a:pPr>
-            <a:r>
-              <a:rPr sz="1350" b="1">
-                <a:solidFill>
-                  <a:srgbClr val="5EB0FF"/>
-                </a:solidFill>
-                <a:latin typeface="PingFang SC"/>
-                <a:ea typeface="PingFang SC"/>
-              </a:rPr>
-              <a:t>价值上移</a:t>
-            </a:r>
-          </a:p>
-          <a:p>
-            <a:pPr algn="l">
-              <a:spcBef>
-                <a:spcPts val="0"/>
-              </a:spcBef>
-              <a:spcAft>
-                <a:spcPts val="300"/>
-              </a:spcAft>
-            </a:pPr>
-            <a:r>
-              <a:rPr sz="1050" b="0">
-                <a:solidFill>
-                  <a:srgbClr val="DDDDDD"/>
-                </a:solidFill>
-                <a:latin typeface="PingFang SC"/>
-                <a:ea typeface="PingFang SC"/>
-              </a:rPr>
-              <a:t>降低落地门槛，放大模型与行业应用价值</a:t>
-            </a:r>
-          </a:p>
-        </p:txBody>
-      </p:sp>
-      <p:sp>
-        <p:nvSpPr>
-          <p:cNvPr id="24" name="TextBox 23"/>
-          <p:cNvSpPr txBox="1"/>
-          <p:nvPr/>
-        </p:nvSpPr>
-        <p:spPr>
-          <a:xfrm>
-            <a:off x="502920" y="6583680"/>
-            <a:ext cx="11155680" cy="274320"/>
-          </a:xfrm>
-          <a:prstGeom prst="rect">
-            <a:avLst/>
-          </a:prstGeom>
-          <a:noFill/>
-        </p:spPr>
-        <p:txBody>
-          <a:bodyPr wrap="square" anchor="t" lIns="25400" rIns="25400" tIns="25400" bIns="25400">
-            <a:spAutoFit/>
-          </a:bodyPr>
-          <a:lstStyle/>
-          <a:p>
-            <a:pPr algn="l">
-              <a:spcBef>
-                <a:spcPts val="0"/>
-              </a:spcBef>
-              <a:spcAft>
-                <a:spcPts val="200"/>
-              </a:spcAft>
-            </a:pPr>
-            <a:r>
-              <a:rPr sz="800" b="0">
-                <a:solidFill>
-                  <a:srgbClr val="5F5F5F"/>
-                </a:solidFill>
-                <a:latin typeface="PingFang SC"/>
-                <a:ea typeface="PingFang SC"/>
-              </a:rPr>
-              <a:t>资料来源：Microsoft Trust Center / On the Issues 博客 / 2025 Responsible AI Transparency Report；EU AI Act 官方时间线（2023.9–2026.06）</a:t>
+              <a:t>资料整理 · 公开信息综合分析 · 2026-06    |    微软AI治理分析</a:t>
             </a:r>
           </a:p>
         </p:txBody>
